--- a/media/sandar/4-amal-tuuraKataLabirinth.pptx
+++ b/media/sandar/4-amal-tuuraKataLabirinth.pptx
@@ -4253,7 +4253,7 @@
                 <a:latin typeface="Arial" panose="020B0604020202020204" pitchFamily="34" charset="0"/>
                 <a:cs typeface="Arial" panose="020B0604020202020204" pitchFamily="34" charset="0"/>
               </a:rPr>
-              <a:t>Студенттер "Старттан" "Аягына" чейинки жолду табышы керек,</a:t>
+              <a:t>Окуучулар «Старттан» «Аягына» чейинки жолду табат,</a:t>
             </a:r>
           </a:p>
           <a:p>
@@ -4295,7 +4295,7 @@
                 <a:latin typeface="Arial" panose="020B0604020202020204" pitchFamily="34" charset="0"/>
                 <a:cs typeface="Arial" panose="020B0604020202020204" pitchFamily="34" charset="0"/>
               </a:rPr>
-              <a:t>Студенттер дубалдагы боштуктан гана өтө алышат.</a:t>
+              <a:t>Окуучулар дубалдагы бош жерден гана өтөт.</a:t>
             </a:r>
           </a:p>
           <a:p>
@@ -4349,7 +4349,7 @@
                 <a:latin typeface="Arial" panose="020B0604020202020204" pitchFamily="34" charset="0"/>
                 <a:cs typeface="Arial" panose="020B0604020202020204" pitchFamily="34" charset="0"/>
               </a:rPr>
-              <a:t>Студенттер үчүн "Өзүң жаса конугуусу" камтылган.</a:t>
+              <a:t>Окуучулар үчүн «Өзүң жаса» бөлүмү бар.</a:t>
             </a:r>
             <a:endParaRPr lang="en-GB" sz="2000" dirty="0">
               <a:solidFill>
